--- a/Lectures/triage-overview.pptx
+++ b/Lectures/triage-overview.pptx
@@ -281,7 +281,7 @@
       <p15:sldGuideLst xmlns:p15="http://schemas.microsoft.com/office/powerpoint/2012/main"/>
     </p:ext>
     <p:ext uri="http://customooxmlschemas.google.com/">
-      <go:slidesCustomData xmlns="" xmlns:mc="http://schemas.openxmlformats.org/markup-compatibility/2006" xmlns:mv="urn:schemas-microsoft-com:mac:vml" xmlns:c="http://schemas.openxmlformats.org/drawingml/2006/chart" xmlns:dgm="http://schemas.openxmlformats.org/drawingml/2006/diagram" xmlns:o="urn:schemas-microsoft-com:office:office" xmlns:v="urn:schemas-microsoft-com:vml" xmlns:pvml="urn:schemas-microsoft-com:office:powerpoint" xmlns:com="http://schemas.openxmlformats.org/drawingml/2006/compatibility" xmlns:p14="http://schemas.microsoft.com/office/powerpoint/2010/main" xmlns:p15="http://schemas.microsoft.com/office/powerpoint/2012/main" xmlns:go="http://customooxmlschemas.google.com/" r:id="rId54" roundtripDataSignature="AMtx7mjFyVUGRZWio+dc9dxzYsimUxNJbg=="/>
+      <go:slidesCustomData xmlns:go="http://customooxmlschemas.google.com/" xmlns:p15="http://schemas.microsoft.com/office/powerpoint/2012/main" xmlns:p14="http://schemas.microsoft.com/office/powerpoint/2010/main" xmlns:com="http://schemas.openxmlformats.org/drawingml/2006/compatibility" xmlns:pvml="urn:schemas-microsoft-com:office:powerpoint" xmlns:v="urn:schemas-microsoft-com:vml" xmlns:o="urn:schemas-microsoft-com:office:office" xmlns:dgm="http://schemas.openxmlformats.org/drawingml/2006/diagram" xmlns:c="http://schemas.openxmlformats.org/drawingml/2006/chart" xmlns:mv="urn:schemas-microsoft-com:mac:vml" xmlns:mc="http://schemas.openxmlformats.org/markup-compatibility/2006" xmlns="" r:id="rId54" roundtripDataSignature="AMtx7mjFyVUGRZWio+dc9dxzYsimUxNJbg=="/>
     </p:ext>
   </p:extLst>
 </p:presentation>
@@ -8228,7 +8228,7 @@
           <a:p>
             <a:r>
               <a:rPr lang="en-US" dirty="0"/>
-              <a:t>Each set of features come from a table object (defined by a table name or a query) that needs a field for </a:t>
+              <a:t>Each set of features come from a table object (defined by a table name or a query ) that needs a field for </a:t>
             </a:r>
             <a:r>
               <a:rPr lang="en-US" dirty="0" err="1">
@@ -8248,7 +8248,19 @@
             </a:r>
             <a:r>
               <a:rPr lang="en-US" dirty="0"/>
-              <a:t>and a time field that specifies when that event happened</a:t>
+              <a:t>and a </a:t>
+            </a:r>
+            <a:r>
+              <a:rPr lang="en-US" dirty="0">
+                <a:solidFill>
+                  <a:srgbClr val="FF0000"/>
+                </a:solidFill>
+              </a:rPr>
+              <a:t>time field </a:t>
+            </a:r>
+            <a:r>
+              <a:rPr lang="en-US" dirty="0"/>
+              <a:t>that specifies when that event happened</a:t>
             </a:r>
             <a:br>
               <a:rPr lang="en-US" dirty="0"/>
@@ -8439,7 +8451,7 @@
                 <a:cs typeface="Calibri"/>
                 <a:sym typeface="Calibri"/>
               </a:rPr>
-              <a:t> method for missing data</a:t>
+              <a:t> method for missing data  - default for this group (each feature can override this)</a:t>
             </a:r>
             <a:endParaRPr sz="2000" b="1" dirty="0">
               <a:latin typeface="Calibri"/>
@@ -8624,7 +8636,7 @@
         </p:nvSpPr>
         <p:spPr>
           <a:xfrm>
-            <a:off x="5870066" y="3515384"/>
+            <a:off x="5893167" y="3666335"/>
             <a:ext cx="5952205" cy="694500"/>
           </a:xfrm>
           <a:prstGeom prst="rect">
@@ -8950,7 +8962,7 @@
                 <a:cs typeface="Calibri"/>
                 <a:sym typeface="Calibri"/>
               </a:rPr>
-              <a:t>refix shared by the features in this group </a:t>
+              <a:t>refix shared by all the features in this group </a:t>
             </a:r>
             <a:endParaRPr sz="2000" b="1" dirty="0">
               <a:latin typeface="Calibri"/>
@@ -10600,37 +10612,7 @@
                   </a:extLst>
                 </a:hlinkClick>
               </a:rPr>
-              <a:t>Days </a:t>
-            </a:r>
-            <a:r>
-              <a:rPr lang="en-US" dirty="0">
-                <a:solidFill>
-                  <a:srgbClr val="8A0002"/>
-                </a:solidFill>
-                <a:hlinkClick r:id="rId2">
-                  <a:extLst>
-                    <a:ext uri="{A12FA001-AC4F-418D-AE19-62706E023703}">
-                      <ahyp:hlinkClr xmlns:ahyp="http://schemas.microsoft.com/office/drawing/2018/hyperlinkcolor" val="tx"/>
-                    </a:ext>
-                  </a:extLst>
-                </a:hlinkClick>
-              </a:rPr>
-              <a:t>between</a:t>
-            </a:r>
-            <a:r>
-              <a:rPr lang="en-US" dirty="0">
-                <a:solidFill>
-                  <a:srgbClr val="8A0002"/>
-                </a:solidFill>
-                <a:hlinkClick r:id="rId2">
-                  <a:extLst>
-                    <a:ext uri="{A12FA001-AC4F-418D-AE19-62706E023703}">
-                      <ahyp:hlinkClr xmlns:ahyp="http://schemas.microsoft.com/office/drawing/2018/hyperlinkcolor" val="tx"/>
-                    </a:ext>
-                  </a:extLst>
-                </a:hlinkClick>
-              </a:rPr>
-              <a:t> inspection cases in San Jose</a:t>
+              <a:t>Days between inspection cases in San Jose</a:t>
             </a:r>
             <a:br>
               <a:rPr lang="en-US" dirty="0">
@@ -10784,7 +10766,7 @@
           <a:p>
             <a:r>
               <a:rPr lang="en-US" dirty="0"/>
-              <a:t>No built-in way to do “most recent value” (might need to pre-compute)</a:t>
+              <a:t>No built-in way to do “most recent value” (need to pre-compute)</a:t>
             </a:r>
             <a:br>
               <a:rPr lang="en-US" dirty="0"/>
